--- a/ゲーム科1年/01_後期/ゲーム制作実習Ⅰ/バージョン管理/06_ファイルの編集.pptx
+++ b/ゲーム科1年/01_後期/ゲーム制作実習Ⅰ/バージョン管理/06_ファイルの編集.pptx
@@ -262,7 +262,7 @@
           <a:p>
             <a:fld id="{E9CC885B-4903-4D54-9A93-00025F12DED9}" type="datetimeFigureOut">
               <a:rPr kumimoji="1" lang="ja-JP" altLang="en-US" smtClean="0"/>
-              <a:t>2025/1/16</a:t>
+              <a:t>2026/1/15</a:t>
             </a:fld>
             <a:endParaRPr kumimoji="1" lang="ja-JP" altLang="en-US"/>
           </a:p>
@@ -492,7 +492,7 @@
           <a:p>
             <a:fld id="{E9CC885B-4903-4D54-9A93-00025F12DED9}" type="datetimeFigureOut">
               <a:rPr kumimoji="1" lang="ja-JP" altLang="en-US" smtClean="0"/>
-              <a:t>2025/1/16</a:t>
+              <a:t>2026/1/15</a:t>
             </a:fld>
             <a:endParaRPr kumimoji="1" lang="ja-JP" altLang="en-US"/>
           </a:p>
@@ -732,7 +732,7 @@
           <a:p>
             <a:fld id="{E9CC885B-4903-4D54-9A93-00025F12DED9}" type="datetimeFigureOut">
               <a:rPr kumimoji="1" lang="ja-JP" altLang="en-US" smtClean="0"/>
-              <a:t>2025/1/16</a:t>
+              <a:t>2026/1/15</a:t>
             </a:fld>
             <a:endParaRPr kumimoji="1" lang="ja-JP" altLang="en-US"/>
           </a:p>
@@ -962,7 +962,7 @@
           <a:p>
             <a:fld id="{E9CC885B-4903-4D54-9A93-00025F12DED9}" type="datetimeFigureOut">
               <a:rPr kumimoji="1" lang="ja-JP" altLang="en-US" smtClean="0"/>
-              <a:t>2025/1/16</a:t>
+              <a:t>2026/1/15</a:t>
             </a:fld>
             <a:endParaRPr kumimoji="1" lang="ja-JP" altLang="en-US"/>
           </a:p>
@@ -1237,7 +1237,7 @@
           <a:p>
             <a:fld id="{E9CC885B-4903-4D54-9A93-00025F12DED9}" type="datetimeFigureOut">
               <a:rPr kumimoji="1" lang="ja-JP" altLang="en-US" smtClean="0"/>
-              <a:t>2025/1/16</a:t>
+              <a:t>2026/1/15</a:t>
             </a:fld>
             <a:endParaRPr kumimoji="1" lang="ja-JP" altLang="en-US"/>
           </a:p>
@@ -1566,7 +1566,7 @@
           <a:p>
             <a:fld id="{E9CC885B-4903-4D54-9A93-00025F12DED9}" type="datetimeFigureOut">
               <a:rPr kumimoji="1" lang="ja-JP" altLang="en-US" smtClean="0"/>
-              <a:t>2025/1/16</a:t>
+              <a:t>2026/1/15</a:t>
             </a:fld>
             <a:endParaRPr kumimoji="1" lang="ja-JP" altLang="en-US"/>
           </a:p>
@@ -2042,7 +2042,7 @@
           <a:p>
             <a:fld id="{E9CC885B-4903-4D54-9A93-00025F12DED9}" type="datetimeFigureOut">
               <a:rPr kumimoji="1" lang="ja-JP" altLang="en-US" smtClean="0"/>
-              <a:t>2025/1/16</a:t>
+              <a:t>2026/1/15</a:t>
             </a:fld>
             <a:endParaRPr kumimoji="1" lang="ja-JP" altLang="en-US"/>
           </a:p>
@@ -2183,7 +2183,7 @@
           <a:p>
             <a:fld id="{E9CC885B-4903-4D54-9A93-00025F12DED9}" type="datetimeFigureOut">
               <a:rPr kumimoji="1" lang="ja-JP" altLang="en-US" smtClean="0"/>
-              <a:t>2025/1/16</a:t>
+              <a:t>2026/1/15</a:t>
             </a:fld>
             <a:endParaRPr kumimoji="1" lang="ja-JP" altLang="en-US"/>
           </a:p>
@@ -2296,7 +2296,7 @@
           <a:p>
             <a:fld id="{E9CC885B-4903-4D54-9A93-00025F12DED9}" type="datetimeFigureOut">
               <a:rPr kumimoji="1" lang="ja-JP" altLang="en-US" smtClean="0"/>
-              <a:t>2025/1/16</a:t>
+              <a:t>2026/1/15</a:t>
             </a:fld>
             <a:endParaRPr kumimoji="1" lang="ja-JP" altLang="en-US"/>
           </a:p>
@@ -2639,7 +2639,7 @@
           <a:p>
             <a:fld id="{E9CC885B-4903-4D54-9A93-00025F12DED9}" type="datetimeFigureOut">
               <a:rPr kumimoji="1" lang="ja-JP" altLang="en-US" smtClean="0"/>
-              <a:t>2025/1/16</a:t>
+              <a:t>2026/1/15</a:t>
             </a:fld>
             <a:endParaRPr kumimoji="1" lang="ja-JP" altLang="en-US"/>
           </a:p>
@@ -2927,7 +2927,7 @@
           <a:p>
             <a:fld id="{E9CC885B-4903-4D54-9A93-00025F12DED9}" type="datetimeFigureOut">
               <a:rPr kumimoji="1" lang="ja-JP" altLang="en-US" smtClean="0"/>
-              <a:t>2025/1/16</a:t>
+              <a:t>2026/1/15</a:t>
             </a:fld>
             <a:endParaRPr kumimoji="1" lang="ja-JP" altLang="en-US"/>
           </a:p>
@@ -3200,7 +3200,7 @@
           <a:p>
             <a:fld id="{E9CC885B-4903-4D54-9A93-00025F12DED9}" type="datetimeFigureOut">
               <a:rPr kumimoji="1" lang="ja-JP" altLang="en-US" smtClean="0"/>
-              <a:t>2025/1/16</a:t>
+              <a:t>2026/1/15</a:t>
             </a:fld>
             <a:endParaRPr kumimoji="1" lang="ja-JP" altLang="en-US"/>
           </a:p>
@@ -4140,7 +4140,7 @@
         <p:spPr>
           <a:xfrm>
             <a:off x="686446" y="3636899"/>
-            <a:ext cx="2191626" cy="369332"/>
+            <a:ext cx="1901483" cy="369332"/>
           </a:xfrm>
           <a:prstGeom prst="rect">
             <a:avLst/>
@@ -4159,7 +4159,7 @@
                   <a:srgbClr val="0070C0"/>
                 </a:solidFill>
               </a:rPr>
-              <a:t>Bitbucket</a:t>
+              <a:t>GitHub</a:t>
             </a:r>
             <a:r>
               <a:rPr lang="ja-JP" altLang="en-US" b="1" dirty="0">
